--- a/TRINH_BAY_BAN_GIAM_HIEU.pptx
+++ b/TRINH_BAY_BAN_GIAM_HIEU.pptx
@@ -143,7 +143,7 @@
                 </a:solidFill>
                 <a:latin typeface="Calibri"/>
               </a:rPr>
-              <a:t>Được xếp theo nguyện vọng thứ mấy (số em)</a:t>
+              <a:t>Số học sinh theo nguyện vọng được xếp</a:t>
             </a:r>
           </a:p>
         </c:rich>
@@ -167,7 +167,7 @@
               <c:strCache>
                 <c:ptCount val="1"/>
                 <c:pt idx="0">
-                  <c:v>Số em</c:v>
+                  <c:v>Số học sinh</c:v>
                 </c:pt>
               </c:strCache>
             </c:strRef>
@@ -787,7 +787,7 @@
           <a:p>
             <a:r>
               <a:rPr lang="en-US" dirty="0"/>
-              <a:t>Mở đầu: giới thiệu mục đích buổi báo cáo — trình bày phần mềm sắp xếp học sinh vào câu lạc bộ, cách nó bảo đảm công bằng, và xin ý kiến Ban Giám hiệu về việc chạy thử.</a:t>
+              <a:t>Mở đầu bằng mục đích buổi báo cáo: giới thiệu phần mềm xếp học sinh vào câu lạc bộ, giải thích vì sao cách xếp này công bằng, và xin ý kiến Ban Giám hiệu về việc chạy thử.</a:t>
             </a:r>
             <a:endParaRPr lang="en-US" dirty="0"/>
           </a:p>
@@ -875,7 +875,7 @@
           <a:p>
             <a:r>
               <a:rPr lang="en-US" dirty="0"/>
-              <a:t>Các tính năng mở rộng đã có trong phần mềm.</a:t>
+              <a:t>Các tính năng này đã có sẵn trong phần mềm.</a:t>
             </a:r>
             <a:endParaRPr lang="en-US" dirty="0"/>
           </a:p>
@@ -963,7 +963,7 @@
           <a:p>
             <a:r>
               <a:rPr lang="en-US" dirty="0"/>
-              <a:t>Kết thúc bằng ba việc cụ thể cần Ban Giám hiệu quyết định. Chỉnh lại nội dung đề nghị cho đúng kế hoạch thực tế của nhóm.</a:t>
+              <a:t>Kết thúc bằng ba việc cụ thể cần Ban Giám hiệu quyết định. Nhóm nên sửa phần đề nghị cho khớp với kế hoạch thực tế.</a:t>
             </a:r>
             <a:endParaRPr lang="en-US" dirty="0"/>
           </a:p>
@@ -1051,7 +1051,7 @@
           <a:p>
             <a:r>
               <a:rPr lang="en-US" dirty="0"/>
-              <a:t>Bốn khó khăn khi xếp học sinh vào CLB. Nhấn mạnh ô cuối: xét theo thứ tự đăng ký là cách phần mềm này thay thế.</a:t>
+              <a:t>Đây là bốn khó khăn thường gặp khi xếp học sinh vào CLB. Nên dừng lâu hơn ở ô cuối, vì phần mềm được làm ra để thay cho cách xét theo thứ tự đăng ký.</a:t>
             </a:r>
             <a:endParaRPr lang="en-US" dirty="0"/>
           </a:p>
@@ -1139,7 +1139,7 @@
           <a:p>
             <a:r>
               <a:rPr lang="en-US" dirty="0"/>
-              <a:t>Quy trình tổng thể. Nhà trường đã quen dùng Microsoft Forms: kết quả Forms xuất ra Excel và nạp thẳng vào phần mềm, không phải chuyển đổi. Dữ liệu học sinh ở lại trên máy của trường.</a:t>
+              <a:t>Nhà trường vốn đã quen dùng Microsoft Forms. Kết quả từ Forms xuất ra Excel là nạp được ngay, không phải chuyển đổi gì. Toàn bộ dữ liệu học sinh nằm trên máy của trường.</a:t>
             </a:r>
             <a:endParaRPr lang="en-US" dirty="0"/>
           </a:p>
@@ -1227,7 +1227,7 @@
           <a:p>
             <a:r>
               <a:rPr lang="en-US" dirty="0"/>
-              <a:t>Giải thích bằng lời thường, không cần công thức. Điểm mấu chốt: CLB giữ tạm chứ không chốt ngay, nên thứ tự nộp đơn không ảnh hưởng tới kết quả.</a:t>
+              <a:t>Nên giải thích bằng lời thường, không cần công thức. Ý chính là CLB chỉ giữ chỗ tạm chứ không chốt ngay, nên thứ tự nộp đơn không làm thay đổi kết quả.</a:t>
             </a:r>
             <a:endParaRPr lang="en-US" dirty="0"/>
           </a:p>
@@ -1315,7 +1315,7 @@
           <a:p>
             <a:r>
               <a:rPr lang="en-US" dirty="0"/>
-              <a:t>Đây là điểm sinh ra từ hoàn cảnh riêng của trường: có CLB thi tuyển, có CLB không. Hai tầng luôn tách bạch, Tầng 1 đứng trọn trước Tầng 2.</a:t>
+              <a:t>Phần này xuất phát từ thực tế của trường: có CLB thi tuyển, có CLB không. Hai tầng luôn tách riêng, toàn bộ Tầng 1 đứng trước Tầng 2.</a:t>
             </a:r>
             <a:endParaRPr lang="en-US" dirty="0"/>
           </a:p>
@@ -1403,7 +1403,7 @@
           <a:p>
             <a:r>
               <a:rPr lang="en-US" dirty="0"/>
-              <a:t>Bước 2 quan trọng: phần mềm tự rà 8 tình huống dữ liệu vẫn hợp lệ nhưng âm thầm làm sai kết quả — ví dụ giáo viên mới chấm dở dang — và hiện ngay phía trên nút Chạy.</a:t>
+              <a:t>Bước 2 rất quan trọng. Phần mềm tự kiểm tra 8 tình huống mà dữ liệu vẫn hợp lệ nhưng có thể làm sai kết quả mà không ai hay, chẳng hạn giáo viên mới chấm được một phần. Các cảnh báo này hiện ngay phía trên nút Chạy.</a:t>
             </a:r>
             <a:endParaRPr lang="en-US" dirty="0"/>
           </a:p>
@@ -1491,7 +1491,7 @@
           <a:p>
             <a:r>
               <a:rPr lang="en-US" dirty="0"/>
-              <a:t>Màn hình Kết quả sau khi chạy trên bộ dữ liệu mô phỏng 120 học sinh, 10 CLB.</a:t>
+              <a:t>Đây là màn hình Kết quả sau khi chạy với bộ dữ liệu mô phỏng gồm 120 học sinh và 10 CLB.</a:t>
             </a:r>
             <a:endParaRPr lang="en-US" dirty="0"/>
           </a:p>
@@ -1579,7 +1579,7 @@
           <a:p>
             <a:r>
               <a:rPr lang="en-US" dirty="0"/>
-              <a:t>Số đo lấy từ du_lieu_test/SO_LIEU_DA_KIEM_CHUNG.md, seed 42. 12 em chưa có chỗ vì các CLB các em chọn đã đầy — phần mềm liệt kê riêng để nhà trường xử lý. Nhắc rõ: đây là dữ liệu mô phỏng.</a:t>
+              <a:t>Số liệu lấy từ du_lieu_test/SO_LIEU_DA_KIEM_CHUNG.md, seed 42. Có 12 học sinh chưa có chỗ vì những CLB các học sinh này chọn đều đã đủ người. Phần mềm tách riêng danh sách này để nhà trường xử lý. Cần nói rõ đây là dữ liệu mô phỏng.</a:t>
             </a:r>
             <a:endParaRPr lang="en-US" dirty="0"/>
           </a:p>
@@ -1667,7 +1667,7 @@
           <a:p>
             <a:r>
               <a:rPr lang="en-US" dirty="0"/>
-              <a:t>“Ổn định” nghĩa là không có học sinh và CLB nào cùng muốn bỏ kết quả để đến với nhau. 1,1% là gộp ba bộ dữ liệu, 270 em: chỉ 3 em có kết cục có suất hay không phụ thuộc bốc thăm.</a:t>
+              <a:t>Kết quả ổn định nghĩa là không có học sinh và CLB nào cùng muốn bỏ kết quả hiện tại để chọn nhau. Con số 1,1% tính trên ba bộ dữ liệu, tổng cộng 270 học sinh: chỉ có 3 học sinh mà việc có chỗ hay không phụ thuộc vào bốc thăm.</a:t>
             </a:r>
             <a:endParaRPr lang="en-US" dirty="0"/>
           </a:p>
@@ -2195,7 +2195,7 @@
                 <a:ea typeface="Cambria" pitchFamily="34" charset="-122"/>
                 <a:cs typeface="Cambria" pitchFamily="34" charset="-120"/>
               </a:rPr>
-              <a:t>học sinh vào Câu lạc bộ</a:t>
+              <a:t>học sinh vào câu lạc bộ</a:t>
             </a:r>
             <a:endParaRPr lang="en-US" sz="4000" dirty="0"/>
           </a:p>
@@ -2234,7 +2234,7 @@
                 <a:ea typeface="Calibri" pitchFamily="34" charset="-122"/>
                 <a:cs typeface="Calibri" pitchFamily="34" charset="-120"/>
               </a:rPr>
-              <a:t>Công bằng · minh bạch · kiểm chứng được — chạy ngoại tuyến trên một máy tính của trường</a:t>
+              <a:t>Xếp chỗ công bằng, ai cũng kiểm tra lại được, chạy ngay trên máy tính của trường</a:t>
             </a:r>
             <a:endParaRPr lang="en-US" sz="1600" dirty="0"/>
           </a:p>
@@ -2273,7 +2273,7 @@
                 <a:ea typeface="Calibri" pitchFamily="34" charset="-122"/>
                 <a:cs typeface="Calibri" pitchFamily="34" charset="-120"/>
               </a:rPr>
-              <a:t>Đề tài nghiên cứu khoa học · Thuật toán RB-DA (Reserve-Based Deferred Acceptance)</a:t>
+              <a:t>Đề tài nghiên cứu khoa học. Thuật toán RB-DA (Reserve-Based Deferred Acceptance)</a:t>
             </a:r>
             <a:endParaRPr lang="en-US" sz="1100" dirty="0"/>
           </a:p>
@@ -2344,7 +2344,7 @@
                 <a:ea typeface="Calibri" pitchFamily="34" charset="-122"/>
                 <a:cs typeface="Calibri" pitchFamily="34" charset="-120"/>
               </a:rPr>
-              <a:t>ĐÃ SẴN SÀNG THÊM</a:t>
+              <a:t>TÍNH NĂNG KHÁC</a:t>
             </a:r>
             <a:endParaRPr lang="en-US" sz="1000" dirty="0"/>
           </a:p>
@@ -2383,7 +2383,7 @@
                 <a:ea typeface="Cambria" pitchFamily="34" charset="-122"/>
                 <a:cs typeface="Cambria" pitchFamily="34" charset="-120"/>
               </a:rPr>
-              <a:t>Dùng được cho nhiều cách tổ chức của trường</a:t>
+              <a:t>Phù hợp với nhiều cách tổ chức</a:t>
             </a:r>
             <a:endParaRPr lang="en-US" sz="3000" dirty="0"/>
           </a:p>
@@ -2537,7 +2537,7 @@
                 <a:ea typeface="Calibri" pitchFamily="34" charset="-122"/>
                 <a:cs typeface="Calibri" pitchFamily="34" charset="-120"/>
               </a:rPr>
-              <a:t>Mỗi CLB sinh hoạt một buổi; học sinh có thể tham gia nhiều CLB miễn không trùng buổi. Phần mềm xếp ra thời khoá biểu CLB cho từng em.</a:t>
+              <a:t>Mỗi CLB sinh hoạt một buổi. Học sinh có thể tham gia nhiều CLB nếu không trùng buổi, và phần mềm xếp thời khóa biểu CLB cho từng học sinh.</a:t>
             </a:r>
             <a:endParaRPr lang="en-US" sz="1100" dirty="0"/>
           </a:p>
@@ -2652,7 +2652,7 @@
                 <a:ea typeface="Calibri" pitchFamily="34" charset="-122"/>
                 <a:cs typeface="Calibri" pitchFamily="34" charset="-120"/>
               </a:rPr>
-              <a:t>Nhập bổ sung tại chỗ</a:t>
+              <a:t>Thêm học sinh tại chỗ</a:t>
             </a:r>
             <a:endParaRPr lang="en-US" sz="1400" dirty="0"/>
           </a:p>
@@ -2691,7 +2691,7 @@
                 <a:ea typeface="Calibri" pitchFamily="34" charset="-122"/>
                 <a:cs typeface="Calibri" pitchFamily="34" charset="-120"/>
               </a:rPr>
-              <a:t>Em không nộp được qua biểu mẫu vẫn được thêm tay; em thêm sau khi đã bốc thăm vẫn được bốc một vị trí ngẫu nhiên, không bị xếp cuối.</a:t>
+              <a:t>Học sinh chưa nộp được qua biểu mẫu vẫn có thể nhập tay. Học sinh thêm vào sau khi đã bốc thăm được xếp một vị trí ngẫu nhiên, không bị đẩy xuống cuối.</a:t>
             </a:r>
             <a:endParaRPr lang="en-US" sz="1100" dirty="0"/>
           </a:p>
@@ -2806,7 +2806,7 @@
                 <a:ea typeface="Calibri" pitchFamily="34" charset="-122"/>
                 <a:cs typeface="Calibri" pitchFamily="34" charset="-120"/>
               </a:rPr>
-              <a:t>Song ngữ Việt – Anh</a:t>
+              <a:t>Hai ngôn ngữ Việt và Anh</a:t>
             </a:r>
             <a:endParaRPr lang="en-US" sz="1400" dirty="0"/>
           </a:p>
@@ -2845,7 +2845,7 @@
                 <a:ea typeface="Calibri" pitchFamily="34" charset="-122"/>
                 <a:cs typeface="Calibri" pitchFamily="34" charset="-120"/>
               </a:rPr>
-              <a:t>Đổi ngôn ngữ giao diện bằng một nút, phù hợp khi có giáo viên nước ngoài phụ trách CLB.</a:t>
+              <a:t>Đổi ngôn ngữ giao diện chỉ bằng một nút, tiện khi có giáo viên nước ngoài phụ trách CLB.</a:t>
             </a:r>
             <a:endParaRPr lang="en-US" sz="1100" dirty="0"/>
           </a:p>
@@ -2960,7 +2960,7 @@
                 <a:ea typeface="Calibri" pitchFamily="34" charset="-122"/>
                 <a:cs typeface="Calibri" pitchFamily="34" charset="-120"/>
               </a:rPr>
-              <a:t>Có hoặc không dùng suất dự trữ</a:t>
+              <a:t>Dùng hoặc không dùng suất dự trữ</a:t>
             </a:r>
             <a:endParaRPr lang="en-US" sz="1400" dirty="0"/>
           </a:p>
@@ -2999,7 +2999,7 @@
                 <a:ea typeface="Calibri" pitchFamily="34" charset="-122"/>
                 <a:cs typeface="Calibri" pitchFamily="34" charset="-120"/>
               </a:rPr>
-              <a:t>Trường không cần diện ưu tiên chỉ việc đặt số suất dự trữ bằng 0 — phần mềm vẫn chạy đúng.</a:t>
+              <a:t>Trường không cần diện ưu tiên thì đặt số suất dự trữ bằng 0, phần mềm vẫn chạy đúng.</a:t>
             </a:r>
             <a:endParaRPr lang="en-US" sz="1100" dirty="0"/>
           </a:p>
@@ -3148,7 +3148,7 @@
                 <a:ea typeface="Cambria" pitchFamily="34" charset="-122"/>
                 <a:cs typeface="Cambria" pitchFamily="34" charset="-120"/>
               </a:rPr>
-              <a:t>Ba quyết định để chạy thử</a:t>
+              <a:t>Ba việc cần quyết định để chạy thử</a:t>
             </a:r>
             <a:endParaRPr lang="en-US" sz="3200" dirty="0"/>
           </a:p>
@@ -3292,7 +3292,7 @@
                 <a:ea typeface="Calibri" pitchFamily="34" charset="-122"/>
                 <a:cs typeface="Calibri" pitchFamily="34" charset="-120"/>
               </a:rPr>
-              <a:t>trong một đợt đăng ký CLB thật, song song với cách làm hiện tại để đối chiếu.</a:t>
+              <a:t>trong một đợt đăng ký CLB thật, song song với cách làm hiện nay để so sánh.</a:t>
             </a:r>
             <a:endParaRPr lang="en-US" sz="1200" dirty="0"/>
           </a:p>
@@ -3397,7 +3397,7 @@
                 <a:ea typeface="Calibri" pitchFamily="34" charset="-122"/>
                 <a:cs typeface="Calibri" pitchFamily="34" charset="-120"/>
               </a:rPr>
-              <a:t>Chốt chính sách suất dự trữ</a:t>
+              <a:t>Thống nhất về suất dự trữ</a:t>
             </a:r>
             <a:endParaRPr lang="en-US" sz="1500" dirty="0"/>
           </a:p>
@@ -3436,7 +3436,7 @@
                 <a:ea typeface="Calibri" pitchFamily="34" charset="-122"/>
                 <a:cs typeface="Calibri" pitchFamily="34" charset="-120"/>
               </a:rPr>
-              <a:t>có dùng hay không, dành cho diện nào, mỗi CLB bao nhiêu suất.</a:t>
+              <a:t>có dùng hay không, dành cho diện nào, và mỗi CLB bao nhiêu chỗ.</a:t>
             </a:r>
             <a:endParaRPr lang="en-US" sz="1200" dirty="0"/>
           </a:p>
@@ -3580,7 +3580,7 @@
                 <a:ea typeface="Calibri" pitchFamily="34" charset="-122"/>
                 <a:cs typeface="Calibri" pitchFamily="34" charset="-120"/>
               </a:rPr>
-              <a:t>một người vận hành phần mềm và giáo viên chấm điểm cho các CLB có thi tuyển.</a:t>
+              <a:t>một người vận hành phần mềm và các giáo viên chấm điểm cho CLB có thi tuyển.</a:t>
             </a:r>
             <a:endParaRPr lang="en-US" sz="1200" dirty="0"/>
           </a:p>
@@ -3729,7 +3729,7 @@
                 <a:ea typeface="Cambria" pitchFamily="34" charset="-122"/>
                 <a:cs typeface="Cambria" pitchFamily="34" charset="-120"/>
               </a:rPr>
-              <a:t>Nhiều CLB, chỗ có hạn — ai vào đâu?</a:t>
+              <a:t>Nhiều CLB, ít chỗ: ai sẽ vào đâu?</a:t>
             </a:r>
             <a:endParaRPr lang="en-US" sz="3000" dirty="0"/>
           </a:p>
@@ -3844,7 +3844,7 @@
                 <a:ea typeface="Calibri" pitchFamily="34" charset="-122"/>
                 <a:cs typeface="Calibri" pitchFamily="34" charset="-120"/>
               </a:rPr>
-              <a:t>Chỗ ít hơn người muốn vào</a:t>
+              <a:t>Chỗ ít hơn số người muốn vào</a:t>
             </a:r>
             <a:endParaRPr lang="en-US" sz="1500" dirty="0"/>
           </a:p>
@@ -3883,7 +3883,7 @@
                 <a:ea typeface="Calibri" pitchFamily="34" charset="-122"/>
                 <a:cs typeface="Calibri" pitchFamily="34" charset="-120"/>
               </a:rPr>
-              <a:t>CLB đông người đăng ký luôn phải từ chối. Cần một quy tắc chọn mà học sinh và phụ huynh chấp nhận được.</a:t>
+              <a:t>Những CLB đông người đăng ký buộc phải từ chối bớt. Vì vậy cần một cách chọn mà học sinh và phụ huynh thấy hợp lý.</a:t>
             </a:r>
             <a:endParaRPr lang="en-US" sz="1200" dirty="0"/>
           </a:p>
@@ -3998,7 +3998,7 @@
                 <a:ea typeface="Calibri" pitchFamily="34" charset="-122"/>
                 <a:cs typeface="Calibri" pitchFamily="34" charset="-120"/>
               </a:rPr>
-              <a:t>Hai loại CLB cùng tồn tại</a:t>
+              <a:t>Có CLB thi, có CLB không</a:t>
             </a:r>
             <a:endParaRPr lang="en-US" sz="1500" dirty="0"/>
           </a:p>
@@ -4037,7 +4037,7 @@
                 <a:ea typeface="Calibri" pitchFamily="34" charset="-122"/>
                 <a:cs typeface="Calibri" pitchFamily="34" charset="-120"/>
               </a:rPr>
-              <a:t>Có CLB thi tuyển, có CLB không. Cách xét thông thường không xử lý được cả hai trong cùng một đợt.</a:t>
+              <a:t>Một số CLB tổ chức thi tuyển, số khác thì không. Cách xét thông thường khó xử lý cả hai loại trong cùng một đợt.</a:t>
             </a:r>
             <a:endParaRPr lang="en-US" sz="1200" dirty="0"/>
           </a:p>
@@ -4152,7 +4152,7 @@
                 <a:ea typeface="Calibri" pitchFamily="34" charset="-122"/>
                 <a:cs typeface="Calibri" pitchFamily="34" charset="-120"/>
               </a:rPr>
-              <a:t>Cần giữ chỗ cho diện ưu tiên</a:t>
+              <a:t>Giữ chỗ cho diện ưu tiên</a:t>
             </a:r>
             <a:endParaRPr lang="en-US" sz="1500" dirty="0"/>
           </a:p>
@@ -4191,7 +4191,7 @@
                 <a:ea typeface="Calibri" pitchFamily="34" charset="-122"/>
                 <a:cs typeface="Calibri" pitchFamily="34" charset="-120"/>
               </a:rPr>
-              <a:t>Nhà trường có thể muốn dành một số suất cho học sinh chính sách hoặc khối 10.</a:t>
+              <a:t>Nhà trường có thể muốn dành một số chỗ cho học sinh diện chính sách hoặc học sinh khối 10.</a:t>
             </a:r>
             <a:endParaRPr lang="en-US" sz="1200" dirty="0"/>
           </a:p>
@@ -4345,7 +4345,7 @@
                 <a:ea typeface="Calibri" pitchFamily="34" charset="-122"/>
                 <a:cs typeface="Calibri" pitchFamily="34" charset="-120"/>
               </a:rPr>
-              <a:t>Xét theo thứ tự đăng ký: em nộp sớm được lợi, em nộp muộn chịu thiệt, dù nguyện vọng và năng lực như nhau.</a:t>
+              <a:t>Nếu xét theo thứ tự đăng ký, học sinh nộp sớm có lợi còn học sinh nộp muộn chịu thiệt, dù nguyện vọng và năng lực như nhau.</a:t>
             </a:r>
             <a:endParaRPr lang="en-US" sz="1200" dirty="0"/>
           </a:p>
@@ -4494,7 +4494,7 @@
                 <a:ea typeface="Cambria" pitchFamily="34" charset="-122"/>
                 <a:cs typeface="Cambria" pitchFamily="34" charset="-120"/>
               </a:rPr>
-              <a:t>Ba tệp Excel vào — danh sách từng CLB ra</a:t>
+              <a:t>Nạp ba tệp Excel, nhận danh sách từng CLB</a:t>
             </a:r>
             <a:endParaRPr lang="en-US" sz="3000" dirty="0"/>
           </a:p>
@@ -4648,7 +4648,7 @@
                 <a:ea typeface="Calibri" pitchFamily="34" charset="-122"/>
                 <a:cs typeface="Calibri" pitchFamily="34" charset="-120"/>
               </a:rPr>
-              <a:t>3 tệp Excel</a:t>
+              <a:t>Ba tệp Excel</a:t>
             </a:r>
             <a:endParaRPr lang="en-US" sz="1600" dirty="0"/>
           </a:p>
@@ -4687,7 +4687,7 @@
                 <a:ea typeface="Calibri" pitchFamily="34" charset="-122"/>
                 <a:cs typeface="Calibri" pitchFamily="34" charset="-120"/>
               </a:rPr>
-              <a:t>Danh sách CLB · CLB muốn thi kèm điểm · xếp hạng nguyện vọng (xuất thẳng từ Microsoft Forms)</a:t>
+              <a:t>Danh sách CLB, các CLB học sinh muốn thi kèm điểm, và thứ tự nguyện vọng. Lấy thẳng từ Microsoft Forms.</a:t>
             </a:r>
             <a:endParaRPr lang="en-US" sz="1100" dirty="0"/>
           </a:p>
@@ -4865,7 +4865,7 @@
                 <a:ea typeface="Calibri" pitchFamily="34" charset="-122"/>
                 <a:cs typeface="Calibri" pitchFamily="34" charset="-120"/>
               </a:rPr>
-              <a:t>Kiểm tra, bốc thăm, xếp</a:t>
+              <a:t>Kiểm tra và xếp chỗ</a:t>
             </a:r>
             <a:endParaRPr lang="en-US" sz="1600" dirty="0"/>
           </a:p>
@@ -4904,7 +4904,7 @@
                 <a:ea typeface="Calibri" pitchFamily="34" charset="-122"/>
                 <a:cs typeface="Calibri" pitchFamily="34" charset="-120"/>
               </a:rPr>
-              <a:t>Tự nhận biết loại tệp, cảnh báo dữ liệu thiếu sót, rồi chạy thuật toán RB-DA</a:t>
+              <a:t>Tự nhận ra từng loại tệp, báo những chỗ dữ liệu còn thiếu, rồi chạy thuật toán RB-DA.</a:t>
             </a:r>
             <a:endParaRPr lang="en-US" sz="1100" dirty="0"/>
           </a:p>
@@ -5082,7 +5082,7 @@
                 <a:ea typeface="Calibri" pitchFamily="34" charset="-122"/>
                 <a:cs typeface="Calibri" pitchFamily="34" charset="-120"/>
               </a:rPr>
-              <a:t>Kết quả để phát</a:t>
+              <a:t>Kết quả để gửi đi</a:t>
             </a:r>
             <a:endParaRPr lang="en-US" sz="1600" dirty="0"/>
           </a:p>
@@ -5121,7 +5121,7 @@
                 <a:ea typeface="Calibri" pitchFamily="34" charset="-122"/>
                 <a:cs typeface="Calibri" pitchFamily="34" charset="-120"/>
               </a:rPr>
-              <a:t>Một tệp tổng cho nhà trường, một tệp cho mỗi CLB, và danh sách em chưa có chỗ</a:t>
+              <a:t>Một tệp tổng cho nhà trường, một tệp riêng cho mỗi CLB, và danh sách học sinh chưa có chỗ.</a:t>
             </a:r>
             <a:endParaRPr lang="en-US" sz="1100" dirty="0"/>
           </a:p>
@@ -5160,7 +5160,7 @@
                 <a:ea typeface="Calibri" pitchFamily="34" charset="-122"/>
                 <a:cs typeface="Calibri" pitchFamily="34" charset="-120"/>
               </a:rPr>
-              <a:t>Chạy hoàn toàn ngoại tuyến</a:t>
+              <a:t>Không cần Internet.</a:t>
             </a:r>
             <a:pPr indent="0" marL="0">
               <a:buNone/>
@@ -5174,7 +5174,7 @@
                 <a:ea typeface="Calibri" pitchFamily="34" charset="-122"/>
                 <a:cs typeface="Calibri" pitchFamily="34" charset="-120"/>
               </a:rPr>
-              <a:t> trên một máy Windows 10/11 — không cần Internet, không gửi dữ liệu học sinh đi đâu, không cần cài đặt.</a:t>
+              <a:t> Phần mềm chạy trên một máy Windows 10 hoặc 11, không cần cài đặt, và dữ liệu học sinh không bị gửi ra ngoài.</a:t>
             </a:r>
             <a:endParaRPr lang="en-US" sz="1300" dirty="0"/>
           </a:p>
@@ -5323,7 +5323,7 @@
                 <a:ea typeface="Cambria" pitchFamily="34" charset="-122"/>
                 <a:cs typeface="Cambria" pitchFamily="34" charset="-120"/>
               </a:rPr>
-              <a:t>Bốn quy tắc, như nhau cho mọi em</a:t>
+              <a:t>Bốn quy tắc chung cho mọi học sinh</a:t>
             </a:r>
             <a:endParaRPr lang="en-US" sz="3000" dirty="0"/>
           </a:p>
@@ -5411,7 +5411,7 @@
                 <a:ea typeface="Calibri" pitchFamily="34" charset="-122"/>
                 <a:cs typeface="Calibri" pitchFamily="34" charset="-120"/>
               </a:rPr>
-              <a:t>Học sinh “nộp đơn” theo thứ tự nguyện vọng</a:t>
+              <a:t>Học sinh nộp đơn theo thứ tự nguyện vọng</a:t>
             </a:r>
             <a:endParaRPr lang="en-US" sz="1500" dirty="0"/>
           </a:p>
@@ -5450,7 +5450,7 @@
                 <a:ea typeface="Calibri" pitchFamily="34" charset="-122"/>
                 <a:cs typeface="Calibri" pitchFamily="34" charset="-120"/>
               </a:rPr>
-              <a:t>Bị từ chối ở nguyện vọng 1 thì tự động chuyển sang nguyện vọng 2, rồi 3…</a:t>
+              <a:t>Nếu không được nhận ở nguyện vọng 1, đơn tự chuyển sang nguyện vọng 2, rồi 3, cứ thế tiếp tục.</a:t>
             </a:r>
             <a:endParaRPr lang="en-US" sz="1200" dirty="0"/>
           </a:p>
@@ -5538,7 +5538,7 @@
                 <a:ea typeface="Calibri" pitchFamily="34" charset="-122"/>
                 <a:cs typeface="Calibri" pitchFamily="34" charset="-120"/>
               </a:rPr>
-              <a:t>CLB chỉ “giữ tạm”, chưa chốt ngay</a:t>
+              <a:t>CLB giữ chỗ tạm, chưa chốt ngay</a:t>
             </a:r>
             <a:endParaRPr lang="en-US" sz="1500" dirty="0"/>
           </a:p>
@@ -5577,7 +5577,7 @@
                 <a:ea typeface="Calibri" pitchFamily="34" charset="-122"/>
                 <a:cs typeface="Calibri" pitchFamily="34" charset="-120"/>
               </a:rPr>
-              <a:t>Em phù hợp hơn đến muộn vẫn được xét công bằng — nộp sớm hay muộn không quan trọng.</a:t>
+              <a:t>Học sinh phù hợp hơn dù đến sau vẫn được xét đầy đủ, nên nộp sớm hay muộn không ảnh hưởng kết quả.</a:t>
             </a:r>
             <a:endParaRPr lang="en-US" sz="1200" dirty="0"/>
           </a:p>
@@ -5665,7 +5665,7 @@
                 <a:ea typeface="Calibri" pitchFamily="34" charset="-122"/>
                 <a:cs typeface="Calibri" pitchFamily="34" charset="-120"/>
               </a:rPr>
-              <a:t>Suất dự trữ “mềm” cho diện ưu tiên</a:t>
+              <a:t>Suất dự trữ cho diện ưu tiên</a:t>
             </a:r>
             <a:endParaRPr lang="en-US" sz="1500" dirty="0"/>
           </a:p>
@@ -5704,7 +5704,7 @@
                 <a:ea typeface="Calibri" pitchFamily="34" charset="-122"/>
                 <a:cs typeface="Calibri" pitchFamily="34" charset="-120"/>
               </a:rPr>
-              <a:t>Không đủ em thuộc diện thì suất thừa tự trả về xét chung — CLB không bị trống chỗ.</a:t>
+              <a:t>Nếu không đủ học sinh thuộc diện, chỗ còn trống được trả lại cho xét chung, CLB không bị thiếu người.</a:t>
             </a:r>
             <a:endParaRPr lang="en-US" sz="1200" dirty="0"/>
           </a:p>
@@ -5792,7 +5792,7 @@
                 <a:ea typeface="Calibri" pitchFamily="34" charset="-122"/>
                 <a:cs typeface="Calibri" pitchFamily="34" charset="-120"/>
               </a:rPr>
-              <a:t>Một lần bốc thăm, dùng chung mọi CLB</a:t>
+              <a:t>Bốc thăm một lần, dùng cho mọi CLB</a:t>
             </a:r>
             <a:endParaRPr lang="en-US" sz="1500" dirty="0"/>
           </a:p>
@@ -5831,7 +5831,7 @@
                 <a:ea typeface="Calibri" pitchFamily="34" charset="-122"/>
                 <a:cs typeface="Calibri" pitchFamily="34" charset="-120"/>
               </a:rPr>
-              <a:t>Chỉ dùng để phân định khi các em ngang nhau; bốc xong thì khoá lại để kết quả tái lập được.</a:t>
+              <a:t>Số bốc thăm chỉ dùng khi hai học sinh ngang nhau. Bốc xong là khóa lại, nên chạy lại vẫn ra đúng kết quả cũ.</a:t>
             </a:r>
             <a:endParaRPr lang="en-US" sz="1200" dirty="0"/>
           </a:p>
@@ -5975,7 +5975,7 @@
                 <a:ea typeface="Calibri" pitchFamily="34" charset="-122"/>
                 <a:cs typeface="Calibri" pitchFamily="34" charset="-120"/>
               </a:rPr>
-              <a:t>Thuộc họ thuật toán Gale–Shapley — nền tảng của nhiều hệ thống tuyển sinh theo nguyện vọng. Phần mềm bổ sung suất dự trữ mềm và bốc thăm dùng chung cho hoàn cảnh CLB trong trường.</a:t>
+              <a:t>Thuộc họ thuật toán Gale-Shapley, vốn được dùng trong nhiều hệ thống tuyển sinh theo nguyện vọng. Phần mềm thêm suất dự trữ và bốc thăm dùng chung cho hợp với CLB trong trường.</a:t>
             </a:r>
             <a:endParaRPr lang="en-US" sz="1200" dirty="0"/>
           </a:p>
@@ -6124,7 +6124,7 @@
                 <a:ea typeface="Cambria" pitchFamily="34" charset="-122"/>
                 <a:cs typeface="Cambria" pitchFamily="34" charset="-120"/>
               </a:rPr>
-              <a:t>CLB xếp hạng học sinh theo hai tầng</a:t>
+              <a:t>Mỗi CLB xếp học sinh thành hai tầng</a:t>
             </a:r>
             <a:endParaRPr lang="en-US" sz="3000" dirty="0"/>
           </a:p>
@@ -6229,7 +6229,7 @@
                 <a:ea typeface="Calibri" pitchFamily="34" charset="-122"/>
                 <a:cs typeface="Calibri" pitchFamily="34" charset="-120"/>
               </a:rPr>
-              <a:t>Em đã được chấm điểm cho CLB đó</a:t>
+              <a:t>Học sinh đã được chấm điểm cho CLB đó</a:t>
             </a:r>
             <a:endParaRPr lang="en-US" sz="1400" dirty="0"/>
           </a:p>
@@ -6268,7 +6268,7 @@
                 <a:ea typeface="Calibri" pitchFamily="34" charset="-122"/>
                 <a:cs typeface="Calibri" pitchFamily="34" charset="-120"/>
               </a:rPr>
-              <a:t>Xếp theo điểm, cao trước. Chỉ khi bằng điểm mới dùng số bốc thăm.</a:t>
+              <a:t>Xếp theo điểm từ cao xuống thấp. Chỉ khi bằng điểm mới dùng đến số bốc thăm.</a:t>
             </a:r>
             <a:endParaRPr lang="en-US" sz="1200" dirty="0"/>
           </a:p>
@@ -6373,7 +6373,7 @@
                 <a:ea typeface="Calibri" pitchFamily="34" charset="-122"/>
                 <a:cs typeface="Calibri" pitchFamily="34" charset="-120"/>
               </a:rPr>
-              <a:t>Em đăng ký nhưng không thi CLB đó</a:t>
+              <a:t>Học sinh đăng ký nhưng không thi CLB đó</a:t>
             </a:r>
             <a:endParaRPr lang="en-US" sz="1400" dirty="0"/>
           </a:p>
@@ -6412,7 +6412,7 @@
                 <a:ea typeface="Calibri" pitchFamily="34" charset="-122"/>
                 <a:cs typeface="Calibri" pitchFamily="34" charset="-120"/>
               </a:rPr>
-              <a:t>Xếp theo số bốc thăm. Luôn đứng sau toàn bộ Tầng 1.</a:t>
+              <a:t>Xếp theo số bốc thăm, luôn đứng sau Tầng 1.</a:t>
             </a:r>
             <a:endParaRPr lang="en-US" sz="1200" dirty="0"/>
           </a:p>
@@ -6451,7 +6451,7 @@
                 <a:ea typeface="Calibri" pitchFamily="34" charset="-122"/>
                 <a:cs typeface="Calibri" pitchFamily="34" charset="-120"/>
               </a:rPr>
-              <a:t>CLB không bao giờ biết em xếp mình là nguyện vọng thứ mấy. </a:t>
+              <a:t>CLB không biết học sinh đặt mình ở nguyện vọng thứ mấy. </a:t>
             </a:r>
             <a:pPr indent="0" marL="0">
               <a:buNone/>
@@ -6465,7 +6465,7 @@
                 <a:ea typeface="Calibri" pitchFamily="34" charset="-122"/>
                 <a:cs typeface="Calibri" pitchFamily="34" charset="-120"/>
               </a:rPr>
-              <a:t>Nhờ vậy học sinh cứ khai thật nguyện vọng — khai “chiến thuật” không giúp em được lợi hơn.</a:t>
+              <a:t>Vì thế học sinh cứ ghi đúng mong muốn của mình. Tính toán chiến thuật cũng không được lợi thêm.</a:t>
             </a:r>
             <a:endParaRPr lang="en-US" sz="1200" dirty="0"/>
           </a:p>
@@ -6556,7 +6556,7 @@
         <p:spPr>
           <a:xfrm>
             <a:off x="6583680" y="1463040"/>
-            <a:ext cx="2011680" cy="457200"/>
+            <a:ext cx="2057400" cy="457200"/>
           </a:xfrm>
           <a:prstGeom prst="rect">
             <a:avLst/>
@@ -6572,7 +6572,7 @@
               <a:buNone/>
             </a:pPr>
             <a:r>
-              <a:rPr lang="en-US" sz="1500" b="1" dirty="0">
+              <a:rPr lang="en-US" sz="1400" b="1" dirty="0">
                 <a:solidFill>
                   <a:srgbClr val="1C2321"/>
                 </a:solidFill>
@@ -6580,9 +6580,9 @@
                 <a:ea typeface="Calibri" pitchFamily="34" charset="-122"/>
                 <a:cs typeface="Calibri" pitchFamily="34" charset="-120"/>
               </a:rPr>
-              <a:t>Chấm điểm “mù”</a:t>
-            </a:r>
-            <a:endParaRPr lang="en-US" sz="1500" dirty="0"/>
+              <a:t>Chấm điểm khách quan</a:t>
+            </a:r>
+            <a:endParaRPr lang="en-US" sz="1400" dirty="0"/>
           </a:p>
         </p:txBody>
       </p:sp>
@@ -6653,7 +6653,7 @@
                 <a:ea typeface="Calibri" pitchFamily="34" charset="-122"/>
                 <a:cs typeface="Calibri" pitchFamily="34" charset="-120"/>
               </a:rPr>
-              <a:t>Giáo viên không thấy số bốc thăm, cũng không thấy em xếp CLB mình là nguyện vọng mấy — nên không thể cho điểm theo hướng có lợi cho ai.</a:t>
+              <a:t>Giáo viên không thấy số bốc thăm, cũng không biết học sinh đặt CLB mình ở nguyện vọng thứ mấy, nên không thể chấm để ưu ái ai.</a:t>
             </a:r>
             <a:endParaRPr lang="en-US" sz="1300" dirty="0"/>
           </a:p>
@@ -6802,7 +6802,7 @@
                 <a:ea typeface="Cambria" pitchFamily="34" charset="-122"/>
                 <a:cs typeface="Cambria" pitchFamily="34" charset="-120"/>
               </a:rPr>
-              <a:t>Người vận hành chỉ cần năm bước</a:t>
+              <a:t>Năm bước để có kết quả</a:t>
             </a:r>
             <a:endParaRPr lang="en-US" sz="3000" dirty="0"/>
           </a:p>
@@ -7031,7 +7031,7 @@
                 <a:ea typeface="Calibri" pitchFamily="34" charset="-122"/>
                 <a:cs typeface="Calibri" pitchFamily="34" charset="-120"/>
               </a:rPr>
-              <a:t>Đọc mục Cảnh báo dữ liệu</a:t>
+              <a:t>Xem mục Cảnh báo dữ liệu</a:t>
             </a:r>
             <a:endParaRPr lang="en-US" sz="1400" dirty="0"/>
           </a:p>
@@ -7283,7 +7283,7 @@
                 <a:ea typeface="Calibri" pitchFamily="34" charset="-122"/>
                 <a:cs typeface="Calibri" pitchFamily="34" charset="-120"/>
               </a:rPr>
-              <a:t>Bấm “Chạy sắp xếp”</a:t>
+              <a:t>Bấm Chạy sắp xếp</a:t>
             </a:r>
             <a:endParaRPr lang="en-US" sz="1400" dirty="0"/>
           </a:p>
@@ -7479,7 +7479,7 @@
                 <a:ea typeface="Calibri" pitchFamily="34" charset="-122"/>
                 <a:cs typeface="Calibri" pitchFamily="34" charset="-120"/>
               </a:rPr>
-              <a:t>Màn hình “Vận hành sắp xếp”: kéo thả tệp, xem cảnh báo, rồi chạy.</a:t>
+              <a:t>Màn hình Vận hành sắp xếp: kéo thả tệp, xem cảnh báo rồi bấm chạy.</a:t>
             </a:r>
             <a:endParaRPr lang="en-US" sz="1000" dirty="0"/>
           </a:p>
@@ -7518,7 +7518,7 @@
                 <a:ea typeface="Calibri" pitchFamily="34" charset="-122"/>
                 <a:cs typeface="Calibri" pitchFamily="34" charset="-120"/>
               </a:rPr>
-              <a:t>Bước chạy sắp xếp và xuất kết quả mất chưa tới một giây với 120 học sinh.</a:t>
+              <a:t>Với 120 học sinh, bước chạy và xuất kết quả xong trong chưa đầy một giây.</a:t>
             </a:r>
             <a:endParaRPr lang="en-US" sz="1200" dirty="0"/>
           </a:p>
@@ -7667,7 +7667,7 @@
                 <a:ea typeface="Cambria" pitchFamily="34" charset="-122"/>
                 <a:cs typeface="Cambria" pitchFamily="34" charset="-120"/>
               </a:rPr>
-              <a:t>CLB nào đầy, CLB nào còn chỗ — thấy ngay</a:t>
+              <a:t>Nhìn vào là biết CLB nào đã đủ người</a:t>
             </a:r>
             <a:endParaRPr lang="en-US" sz="3000" dirty="0"/>
           </a:p>
@@ -7737,7 +7737,7 @@
                 <a:ea typeface="Calibri" pitchFamily="34" charset="-122"/>
                 <a:cs typeface="Calibri" pitchFamily="34" charset="-120"/>
               </a:rPr>
-              <a:t>Xanh: vào theo diện chung · Vàng: vào bằng suất dự trữ. Dữ liệu mô phỏng.</a:t>
+              <a:t>Màu xanh: xét chung. Màu vàng: vào bằng suất dự trữ. Dữ liệu mô phỏng.</a:t>
             </a:r>
             <a:endParaRPr lang="en-US" sz="1000" dirty="0"/>
           </a:p>
@@ -7825,7 +7825,7 @@
                 <a:ea typeface="Calibri" pitchFamily="34" charset="-122"/>
                 <a:cs typeface="Calibri" pitchFamily="34" charset="-120"/>
               </a:rPr>
-              <a:t>Tỉ lệ lấp đầy từng CLB</a:t>
+              <a:t>Mức lấp đầy của từng CLB</a:t>
             </a:r>
             <a:endParaRPr lang="en-US" sz="1300" dirty="0"/>
           </a:p>
@@ -7864,7 +7864,7 @@
                 <a:ea typeface="Calibri" pitchFamily="34" charset="-122"/>
                 <a:cs typeface="Calibri" pitchFamily="34" charset="-120"/>
               </a:rPr>
-              <a:t>và bao nhiêu chỗ đi vào suất dự trữ</a:t>
+              <a:t>kèm số chỗ dùng cho suất dự trữ</a:t>
             </a:r>
             <a:endParaRPr lang="en-US" sz="1100" dirty="0"/>
           </a:p>
@@ -7952,7 +7952,7 @@
                 <a:ea typeface="Calibri" pitchFamily="34" charset="-122"/>
                 <a:cs typeface="Calibri" pitchFamily="34" charset="-120"/>
               </a:rPr>
-              <a:t>Nguyện vọng thứ mấy thì được</a:t>
+              <a:t>Được nguyện vọng thứ mấy</a:t>
             </a:r>
             <a:endParaRPr lang="en-US" sz="1300" dirty="0"/>
           </a:p>
@@ -7991,7 +7991,7 @@
                 <a:ea typeface="Calibri" pitchFamily="34" charset="-122"/>
                 <a:cs typeface="Calibri" pitchFamily="34" charset="-120"/>
               </a:rPr>
-              <a:t>để biết học sinh hài lòng tới đâu</a:t>
+              <a:t>cho thấy học sinh hài lòng đến đâu</a:t>
             </a:r>
             <a:endParaRPr lang="en-US" sz="1100" dirty="0"/>
           </a:p>
@@ -8079,7 +8079,7 @@
                 <a:ea typeface="Calibri" pitchFamily="34" charset="-122"/>
                 <a:cs typeface="Calibri" pitchFamily="34" charset="-120"/>
               </a:rPr>
-              <a:t>Danh sách em chưa có chỗ</a:t>
+              <a:t>Học sinh chưa có chỗ</a:t>
             </a:r>
             <a:endParaRPr lang="en-US" sz="1300" dirty="0"/>
           </a:p>
@@ -8118,7 +8118,7 @@
                 <a:ea typeface="Calibri" pitchFamily="34" charset="-122"/>
                 <a:cs typeface="Calibri" pitchFamily="34" charset="-120"/>
               </a:rPr>
-              <a:t>nhóm nhà trường cần xử lý tiếp</a:t>
+              <a:t>danh sách để nhà trường xử lý tiếp</a:t>
             </a:r>
             <a:endParaRPr lang="en-US" sz="1100" dirty="0"/>
           </a:p>
@@ -8206,7 +8206,7 @@
                 <a:ea typeface="Calibri" pitchFamily="34" charset="-122"/>
                 <a:cs typeface="Calibri" pitchFamily="34" charset="-120"/>
               </a:rPr>
-              <a:t>Xuất tệp cho từng CLB</a:t>
+              <a:t>Tệp riêng cho từng CLB</a:t>
             </a:r>
             <a:endParaRPr lang="en-US" sz="1300" dirty="0"/>
           </a:p>
@@ -8245,7 +8245,7 @@
                 <a:ea typeface="Calibri" pitchFamily="34" charset="-122"/>
                 <a:cs typeface="Calibri" pitchFamily="34" charset="-120"/>
               </a:rPr>
-              <a:t>phát thẳng cho giáo viên phụ trách</a:t>
+              <a:t>gửi thẳng cho giáo viên phụ trách</a:t>
             </a:r>
             <a:endParaRPr lang="en-US" sz="1100" dirty="0"/>
           </a:p>
@@ -8394,7 +8394,7 @@
                 <a:ea typeface="Cambria" pitchFamily="34" charset="-122"/>
                 <a:cs typeface="Cambria" pitchFamily="34" charset="-120"/>
               </a:rPr>
-              <a:t>Chạy thử với 120 học sinh, 10 CLB, 130 chỗ</a:t>
+              <a:t>Chạy thử: 120 học sinh, 10 CLB, 130 chỗ</a:t>
             </a:r>
             <a:endParaRPr lang="en-US" sz="3000" dirty="0"/>
           </a:p>
@@ -8472,7 +8472,7 @@
                 <a:ea typeface="Calibri" pitchFamily="34" charset="-122"/>
                 <a:cs typeface="Calibri" pitchFamily="34" charset="-120"/>
               </a:rPr>
-              <a:t>em được xếp CLB</a:t>
+              <a:t>học sinh có CLB</a:t>
             </a:r>
             <a:endParaRPr lang="en-US" sz="1200" dirty="0"/>
           </a:p>
@@ -8628,7 +8628,7 @@
                 <a:ea typeface="Calibri" pitchFamily="34" charset="-122"/>
                 <a:cs typeface="Calibri" pitchFamily="34" charset="-120"/>
               </a:rPr>
-              <a:t>em vào bằng suất dự trữ</a:t>
+              <a:t>vào bằng suất dự trữ</a:t>
             </a:r>
             <a:endParaRPr lang="en-US" sz="1200" dirty="0"/>
           </a:p>
@@ -8815,7 +8815,7 @@
                 <a:ea typeface="Calibri" pitchFamily="34" charset="-122"/>
                 <a:cs typeface="Calibri" pitchFamily="34" charset="-120"/>
               </a:rPr>
-              <a:t>Dữ liệu mô phỏng</a:t>
+              <a:t>Dữ liệu mô phỏng.</a:t>
             </a:r>
             <a:pPr indent="0" marL="0">
               <a:buNone/>
@@ -8829,7 +8829,7 @@
                 <a:ea typeface="Calibri" pitchFamily="34" charset="-122"/>
                 <a:cs typeface="Calibri" pitchFamily="34" charset="-120"/>
               </a:rPr>
-              <a:t> do máy sinh, cố ý tạo cạnh tranh cao để kiểm tra thuật toán — không phải số liệu học sinh thật của trường.</a:t>
+              <a:t> Bộ dữ liệu do máy tạo ra để thử thuật toán, không phải số liệu thật của học sinh trong trường.</a:t>
             </a:r>
             <a:endParaRPr lang="en-US" sz="1100" dirty="0"/>
           </a:p>
@@ -8978,7 +8978,7 @@
                 <a:ea typeface="Cambria" pitchFamily="34" charset="-122"/>
                 <a:cs typeface="Cambria" pitchFamily="34" charset="-120"/>
               </a:rPr>
-              <a:t>Công bằng được đo, không chỉ được hứa</a:t>
+              <a:t>Công bằng có số đo cụ thể</a:t>
             </a:r>
             <a:endParaRPr lang="en-US" sz="3000" dirty="0"/>
           </a:p>
@@ -9083,7 +9083,7 @@
                 <a:ea typeface="Calibri" pitchFamily="34" charset="-122"/>
                 <a:cs typeface="Calibri" pitchFamily="34" charset="-120"/>
               </a:rPr>
-              <a:t>cặp học sinh – CLB muốn đổi cho nhau</a:t>
+              <a:t>cặp học sinh và CLB cùng muốn đổi kết quả</a:t>
             </a:r>
             <a:endParaRPr lang="en-US" sz="1200" dirty="0"/>
           </a:p>
@@ -9122,7 +9122,7 @@
                 <a:ea typeface="Calibri" pitchFamily="34" charset="-122"/>
                 <a:cs typeface="Calibri" pitchFamily="34" charset="-120"/>
               </a:rPr>
-              <a:t>qua 200 lần bốc thăm khác nhau: kết quả luôn “ổn định”</a:t>
+              <a:t>kiểm tra qua 200 lần bốc thăm khác nhau</a:t>
             </a:r>
             <a:endParaRPr lang="en-US" sz="1050" dirty="0"/>
           </a:p>
@@ -9227,7 +9227,7 @@
                 <a:ea typeface="Calibri" pitchFamily="34" charset="-122"/>
                 <a:cs typeface="Calibri" pitchFamily="34" charset="-120"/>
               </a:rPr>
-              <a:t>học sinh có kết cục phụ thuộc bốc thăm</a:t>
+              <a:t>học sinh có kết quả phụ thuộc bốc thăm</a:t>
             </a:r>
             <a:endParaRPr lang="en-US" sz="1200" dirty="0"/>
           </a:p>
@@ -9266,7 +9266,7 @@
                 <a:ea typeface="Calibri" pitchFamily="34" charset="-122"/>
                 <a:cs typeface="Calibri" pitchFamily="34" charset="-120"/>
               </a:rPr>
-              <a:t>chỉ những em ngang điểm đúng ở ranh giới chỉ tiêu</a:t>
+              <a:t>chỉ những học sinh ngang hàng nhau, đứng đúng ở ranh giới chỉ tiêu</a:t>
             </a:r>
             <a:endParaRPr lang="en-US" sz="1050" dirty="0"/>
           </a:p>
@@ -9410,7 +9410,7 @@
                 <a:ea typeface="Calibri" pitchFamily="34" charset="-122"/>
                 <a:cs typeface="Calibri" pitchFamily="34" charset="-120"/>
               </a:rPr>
-              <a:t>chạy lại sau mỗi lần sửa mã nguồn</a:t>
+              <a:t>chạy lại mỗi khi sửa mã nguồn</a:t>
             </a:r>
             <a:endParaRPr lang="en-US" sz="1050" dirty="0"/>
           </a:p>
@@ -9537,7 +9537,7 @@
                 <a:ea typeface="Calibri" pitchFamily="34" charset="-122"/>
                 <a:cs typeface="Calibri" pitchFamily="34" charset="-120"/>
               </a:rPr>
-              <a:t>giữ 10 bản gần nhất</a:t>
+              <a:t>luôn giữ 10 bản gần nhất</a:t>
             </a:r>
             <a:endParaRPr lang="en-US" sz="1050" dirty="0"/>
           </a:p>
@@ -9625,7 +9625,7 @@
                 <a:ea typeface="Calibri" pitchFamily="34" charset="-122"/>
                 <a:cs typeface="Calibri" pitchFamily="34" charset="-120"/>
               </a:rPr>
-              <a:t>Màn hình phục hồi khi dữ liệu hỏng</a:t>
+              <a:t>Khôi phục được khi dữ liệu hỏng</a:t>
             </a:r>
             <a:endParaRPr lang="en-US" sz="1200" dirty="0"/>
           </a:p>
@@ -9664,7 +9664,7 @@
                 <a:ea typeface="Calibri" pitchFamily="34" charset="-122"/>
                 <a:cs typeface="Calibri" pitchFamily="34" charset="-120"/>
               </a:rPr>
-              <a:t>chọn khôi phục bản sao lưu còn đọc được</a:t>
+              <a:t>lấy lại từ bản sao lưu còn dùng được</a:t>
             </a:r>
             <a:endParaRPr lang="en-US" sz="1050" dirty="0"/>
           </a:p>
@@ -9752,7 +9752,7 @@
                 <a:ea typeface="Calibri" pitchFamily="34" charset="-122"/>
                 <a:cs typeface="Calibri" pitchFamily="34" charset="-120"/>
               </a:rPr>
-              <a:t>8 cảnh báo dữ liệu trước khi chạy</a:t>
+              <a:t>8 cảnh báo trước khi chạy</a:t>
             </a:r>
             <a:endParaRPr lang="en-US" sz="1200" dirty="0"/>
           </a:p>
@@ -9791,7 +9791,7 @@
                 <a:ea typeface="Calibri" pitchFamily="34" charset="-122"/>
                 <a:cs typeface="Calibri" pitchFamily="34" charset="-120"/>
               </a:rPr>
-              <a:t>bắt lỗi nhập liệu mà mắt thường bỏ sót</a:t>
+              <a:t>phát hiện lỗi nhập liệu dễ bị bỏ sót</a:t>
             </a:r>
             <a:endParaRPr lang="en-US" sz="1050" dirty="0"/>
           </a:p>
@@ -9830,7 +9830,7 @@
                 <a:ea typeface="Calibri" pitchFamily="34" charset="-122"/>
                 <a:cs typeface="Calibri" pitchFamily="34" charset="-120"/>
               </a:rPr>
-              <a:t>Số đo trên dữ liệu mô phỏng; cách đo lại được ghi kèm trong hồ sơ dự án.</a:t>
+              <a:t>Các số đo dựa trên dữ liệu mô phỏng. Cách đo lại có ghi trong hồ sơ dự án.</a:t>
             </a:r>
             <a:endParaRPr lang="en-US" sz="1000" dirty="0"/>
           </a:p>

--- a/TRINH_BAY_BAN_GIAM_HIEU.pptx
+++ b/TRINH_BAY_BAN_GIAM_HIEU.pptx
@@ -146,7 +146,7 @@
                 </a:solidFill>
                 <a:latin typeface="Calibri"/>
               </a:rPr>
-              <a:t>Số học sinh theo nguyện vọng được xếp</a:t>
+              <a:t>Số lượt xếp theo nguyện vọng (569 lượt)</a:t>
             </a:r>
           </a:p>
         </c:rich>
@@ -170,7 +170,7 @@
               <c:strCache>
                 <c:ptCount val="1"/>
                 <c:pt idx="0">
-                  <c:v>Số học sinh</c:v>
+                  <c:v>Số lượt xếp</c:v>
                 </c:pt>
               </c:strCache>
             </c:strRef>
@@ -235,16 +235,16 @@
                 <c:formatCode>General</c:formatCode>
                 <c:ptCount val="4"/>
                 <c:pt idx="0">
-                  <c:v>64</c:v>
+                  <c:v>427</c:v>
                 </c:pt>
                 <c:pt idx="1">
-                  <c:v>28</c:v>
+                  <c:v>98</c:v>
                 </c:pt>
                 <c:pt idx="2">
-                  <c:v>10</c:v>
+                  <c:v>27</c:v>
                 </c:pt>
                 <c:pt idx="3">
-                  <c:v>6</c:v>
+                  <c:v>17</c:v>
                 </c:pt>
               </c:numCache>
             </c:numRef>
@@ -1511,7 +1511,7 @@
           <a:p>
             <a:r>
               <a:rPr lang="en-US" dirty="0"/>
-              <a:t>Số liệu lấy từ du_lieu_test/SO_LIEU_DA_KIEM_CHUNG.md, seed 42. Có 12 học sinh chưa có chỗ vì những CLB các học sinh này chọn đều đã đủ người. Phần mềm tách riêng danh sách này để nhà trường xử lý. Cần nói rõ đây là dữ liệu mô phỏng.</a:t>
+              <a:t>Bộ chính là du_lieu_test/bo_can_bang (seed 31415), chạy với hạt giống bốc thăm 42. Bộ này mô phỏng hình dáng một trường nhiều buổi: chỉ 6 trên 24 CLB tổ chức thi. Mỗi học sinh được tối đa một CLB mỗi buổi, nên 'lượt xếp' là một lần một học sinh được xếp vào một CLB ở một buổi; 182 học sinh có tổng cộng 569 lượt. 15 học sinh không ghi nguyện vọng nào nên không có CLB, phần mềm đã cảnh báo trước khi chạy. 3 học sinh có đăng ký nhưng mọi CLB các học sinh này chọn đều đã đủ người (23 trên 24 CLB kín chỗ). Dòng so sánh lấy từ bộ TEST 120 học sinh, cố ý cho cạnh tranh cao, để cho thấy phần mềm vẫn xếp đúng khi thiếu chỗ. Cả hai bộ đều là dữ liệu mô phỏng.</a:t>
             </a:r>
             <a:endParaRPr lang="en-US" dirty="0"/>
           </a:p>
@@ -2567,7 +2567,7 @@
           <a:p>
             <a:r>
               <a:rPr lang="en-US" dirty="0"/>
-              <a:t>Đây là màn hình Kết quả sau khi chạy với bộ dữ liệu mô phỏng gồm 120 học sinh và 10 CLB.</a:t>
+              <a:t>Đây là màn hình Kết quả sau khi chạy với bộ dữ liệu mô phỏng bo_can_bang: 200 học sinh, 24 CLB, 6 buổi. 23 trên 24 CLB đã đủ người. Ảnh chỉ chụp phần đầu danh sách CLB.</a:t>
             </a:r>
             <a:endParaRPr lang="en-US" dirty="0"/>
           </a:p>
@@ -3283,7 +3283,7 @@
                 <a:ea typeface="Cambria" pitchFamily="34" charset="-122"/>
                 <a:cs typeface="Cambria" pitchFamily="34" charset="-120"/>
               </a:rPr>
-              <a:t>Chạy thử: 120 học sinh, 10 CLB, 130 chỗ</a:t>
+              <a:t>Chạy thử: 200 học sinh, 24 CLB, 6 buổi</a:t>
             </a:r>
             <a:endParaRPr lang="en-US" sz="3000" dirty="0"/>
           </a:p>
@@ -3297,24 +3297,24 @@
         </p:nvSpPr>
         <p:spPr>
           <a:xfrm>
-            <a:off x="457200" y="1188720"/>
-            <a:ext cx="1737360" cy="548640"/>
-          </a:xfrm>
-          <a:prstGeom prst="rect">
-            <a:avLst/>
-          </a:prstGeom>
-          <a:noFill/>
-          <a:ln/>
-        </p:spPr>
-        <p:txBody>
-          <a:bodyPr wrap="square" lIns="0" tIns="0" rIns="0" bIns="0" rtlCol="0" anchor="ctr"/>
-          <a:lstStyle/>
-          <a:p>
-            <a:pPr indent="0" marL="0">
-              <a:buNone/>
-            </a:pPr>
-            <a:r>
-              <a:rPr lang="en-US" sz="2800" b="1" dirty="0">
+            <a:off x="457200" y="1143000"/>
+            <a:ext cx="1737360" cy="502920"/>
+          </a:xfrm>
+          <a:prstGeom prst="rect">
+            <a:avLst/>
+          </a:prstGeom>
+          <a:noFill/>
+          <a:ln/>
+        </p:spPr>
+        <p:txBody>
+          <a:bodyPr wrap="square" lIns="0" tIns="0" rIns="0" bIns="0" rtlCol="0" anchor="ctr"/>
+          <a:lstStyle/>
+          <a:p>
+            <a:pPr indent="0" marL="0">
+              <a:buNone/>
+            </a:pPr>
+            <a:r>
+              <a:rPr lang="en-US" sz="2600" b="1" dirty="0">
                 <a:solidFill>
                   <a:srgbClr val="3F6B52"/>
                 </a:solidFill>
@@ -3322,9 +3322,9 @@
                 <a:ea typeface="Cambria" pitchFamily="34" charset="-122"/>
                 <a:cs typeface="Cambria" pitchFamily="34" charset="-120"/>
               </a:rPr>
-              <a:t>108/120</a:t>
-            </a:r>
-            <a:endParaRPr lang="en-US" sz="2800" dirty="0"/>
+              <a:t>182/185</a:t>
+            </a:r>
+            <a:endParaRPr lang="en-US" sz="2600" dirty="0"/>
           </a:p>
         </p:txBody>
       </p:sp>
@@ -3336,24 +3336,24 @@
         </p:nvSpPr>
         <p:spPr>
           <a:xfrm>
-            <a:off x="2103120" y="1188720"/>
-            <a:ext cx="1783080" cy="548640"/>
-          </a:xfrm>
-          <a:prstGeom prst="rect">
-            <a:avLst/>
-          </a:prstGeom>
-          <a:noFill/>
-          <a:ln/>
-        </p:spPr>
-        <p:txBody>
-          <a:bodyPr wrap="square" lIns="0" tIns="0" rIns="0" bIns="0" rtlCol="0" anchor="ctr"/>
-          <a:lstStyle/>
-          <a:p>
-            <a:pPr indent="0" marL="0">
-              <a:buNone/>
-            </a:pPr>
-            <a:r>
-              <a:rPr lang="en-US" sz="1200" dirty="0">
+            <a:off x="2148840" y="1143000"/>
+            <a:ext cx="1828800" cy="502920"/>
+          </a:xfrm>
+          <a:prstGeom prst="rect">
+            <a:avLst/>
+          </a:prstGeom>
+          <a:noFill/>
+          <a:ln/>
+        </p:spPr>
+        <p:txBody>
+          <a:bodyPr wrap="square" lIns="0" tIns="0" rIns="0" bIns="0" rtlCol="0" anchor="ctr"/>
+          <a:lstStyle/>
+          <a:p>
+            <a:pPr indent="0" marL="0">
+              <a:buNone/>
+            </a:pPr>
+            <a:r>
+              <a:rPr lang="en-US" sz="1150" dirty="0">
                 <a:solidFill>
                   <a:srgbClr val="3A423F"/>
                 </a:solidFill>
@@ -3361,9 +3361,9 @@
                 <a:ea typeface="Calibri" pitchFamily="34" charset="-122"/>
                 <a:cs typeface="Calibri" pitchFamily="34" charset="-120"/>
               </a:rPr>
-              <a:t>học sinh có CLB</a:t>
-            </a:r>
-            <a:endParaRPr lang="en-US" sz="1200" dirty="0"/>
+              <a:t>học sinh có đăng ký đã có CLB</a:t>
+            </a:r>
+            <a:endParaRPr lang="en-US" sz="1150" dirty="0"/>
           </a:p>
         </p:txBody>
       </p:sp>
@@ -3375,24 +3375,24 @@
         </p:nvSpPr>
         <p:spPr>
           <a:xfrm>
-            <a:off x="457200" y="1965960"/>
-            <a:ext cx="1737360" cy="548640"/>
-          </a:xfrm>
-          <a:prstGeom prst="rect">
-            <a:avLst/>
-          </a:prstGeom>
-          <a:noFill/>
-          <a:ln/>
-        </p:spPr>
-        <p:txBody>
-          <a:bodyPr wrap="square" lIns="0" tIns="0" rIns="0" bIns="0" rtlCol="0" anchor="ctr"/>
-          <a:lstStyle/>
-          <a:p>
-            <a:pPr indent="0" marL="0">
-              <a:buNone/>
-            </a:pPr>
-            <a:r>
-              <a:rPr lang="en-US" sz="2800" b="1" dirty="0">
+            <a:off x="457200" y="1783080"/>
+            <a:ext cx="1737360" cy="502920"/>
+          </a:xfrm>
+          <a:prstGeom prst="rect">
+            <a:avLst/>
+          </a:prstGeom>
+          <a:noFill/>
+          <a:ln/>
+        </p:spPr>
+        <p:txBody>
+          <a:bodyPr wrap="square" lIns="0" tIns="0" rIns="0" bIns="0" rtlCol="0" anchor="ctr"/>
+          <a:lstStyle/>
+          <a:p>
+            <a:pPr indent="0" marL="0">
+              <a:buNone/>
+            </a:pPr>
+            <a:r>
+              <a:rPr lang="en-US" sz="2600" b="1" dirty="0">
                 <a:solidFill>
                   <a:srgbClr val="3F6B52"/>
                 </a:solidFill>
@@ -3400,9 +3400,9 @@
                 <a:ea typeface="Cambria" pitchFamily="34" charset="-122"/>
                 <a:cs typeface="Cambria" pitchFamily="34" charset="-120"/>
               </a:rPr>
-              <a:t>59%</a:t>
-            </a:r>
-            <a:endParaRPr lang="en-US" sz="2800" dirty="0"/>
+              <a:t>75%</a:t>
+            </a:r>
+            <a:endParaRPr lang="en-US" sz="2600" dirty="0"/>
           </a:p>
         </p:txBody>
       </p:sp>
@@ -3414,24 +3414,24 @@
         </p:nvSpPr>
         <p:spPr>
           <a:xfrm>
-            <a:off x="2103120" y="1965960"/>
-            <a:ext cx="1783080" cy="548640"/>
-          </a:xfrm>
-          <a:prstGeom prst="rect">
-            <a:avLst/>
-          </a:prstGeom>
-          <a:noFill/>
-          <a:ln/>
-        </p:spPr>
-        <p:txBody>
-          <a:bodyPr wrap="square" lIns="0" tIns="0" rIns="0" bIns="0" rtlCol="0" anchor="ctr"/>
-          <a:lstStyle/>
-          <a:p>
-            <a:pPr indent="0" marL="0">
-              <a:buNone/>
-            </a:pPr>
-            <a:r>
-              <a:rPr lang="en-US" sz="1200" dirty="0">
+            <a:off x="2148840" y="1783080"/>
+            <a:ext cx="1828800" cy="502920"/>
+          </a:xfrm>
+          <a:prstGeom prst="rect">
+            <a:avLst/>
+          </a:prstGeom>
+          <a:noFill/>
+          <a:ln/>
+        </p:spPr>
+        <p:txBody>
+          <a:bodyPr wrap="square" lIns="0" tIns="0" rIns="0" bIns="0" rtlCol="0" anchor="ctr"/>
+          <a:lstStyle/>
+          <a:p>
+            <a:pPr indent="0" marL="0">
+              <a:buNone/>
+            </a:pPr>
+            <a:r>
+              <a:rPr lang="en-US" sz="1150" dirty="0">
                 <a:solidFill>
                   <a:srgbClr val="3A423F"/>
                 </a:solidFill>
@@ -3439,9 +3439,9 @@
                 <a:ea typeface="Calibri" pitchFamily="34" charset="-122"/>
                 <a:cs typeface="Calibri" pitchFamily="34" charset="-120"/>
               </a:rPr>
-              <a:t>được nguyện vọng 1</a:t>
-            </a:r>
-            <a:endParaRPr lang="en-US" sz="1200" dirty="0"/>
+              <a:t>lượt xếp đúng nguyện vọng 1</a:t>
+            </a:r>
+            <a:endParaRPr lang="en-US" sz="1150" dirty="0"/>
           </a:p>
         </p:txBody>
       </p:sp>
@@ -3453,34 +3453,34 @@
         </p:nvSpPr>
         <p:spPr>
           <a:xfrm>
-            <a:off x="457200" y="2743200"/>
-            <a:ext cx="1737360" cy="548640"/>
-          </a:xfrm>
-          <a:prstGeom prst="rect">
-            <a:avLst/>
-          </a:prstGeom>
-          <a:noFill/>
-          <a:ln/>
-        </p:spPr>
-        <p:txBody>
-          <a:bodyPr wrap="square" lIns="0" tIns="0" rIns="0" bIns="0" rtlCol="0" anchor="ctr"/>
-          <a:lstStyle/>
-          <a:p>
-            <a:pPr indent="0" marL="0">
-              <a:buNone/>
-            </a:pPr>
-            <a:r>
-              <a:rPr lang="en-US" sz="2800" b="1" dirty="0">
-                <a:solidFill>
-                  <a:srgbClr val="C98A1F"/>
+            <a:off x="457200" y="2423160"/>
+            <a:ext cx="1737360" cy="502920"/>
+          </a:xfrm>
+          <a:prstGeom prst="rect">
+            <a:avLst/>
+          </a:prstGeom>
+          <a:noFill/>
+          <a:ln/>
+        </p:spPr>
+        <p:txBody>
+          <a:bodyPr wrap="square" lIns="0" tIns="0" rIns="0" bIns="0" rtlCol="0" anchor="ctr"/>
+          <a:lstStyle/>
+          <a:p>
+            <a:pPr indent="0" marL="0">
+              <a:buNone/>
+            </a:pPr>
+            <a:r>
+              <a:rPr lang="en-US" sz="2600" b="1" dirty="0">
+                <a:solidFill>
+                  <a:srgbClr val="3F6B52"/>
                 </a:solidFill>
                 <a:latin typeface="Cambria" pitchFamily="34" charset="0"/>
                 <a:ea typeface="Cambria" pitchFamily="34" charset="-122"/>
                 <a:cs typeface="Cambria" pitchFamily="34" charset="-120"/>
               </a:rPr>
-              <a:t>10</a:t>
-            </a:r>
-            <a:endParaRPr lang="en-US" sz="2800" dirty="0"/>
+              <a:t>3,1</a:t>
+            </a:r>
+            <a:endParaRPr lang="en-US" sz="2600" dirty="0"/>
           </a:p>
         </p:txBody>
       </p:sp>
@@ -3492,24 +3492,24 @@
         </p:nvSpPr>
         <p:spPr>
           <a:xfrm>
-            <a:off x="2103120" y="2743200"/>
-            <a:ext cx="1783080" cy="548640"/>
-          </a:xfrm>
-          <a:prstGeom prst="rect">
-            <a:avLst/>
-          </a:prstGeom>
-          <a:noFill/>
-          <a:ln/>
-        </p:spPr>
-        <p:txBody>
-          <a:bodyPr wrap="square" lIns="0" tIns="0" rIns="0" bIns="0" rtlCol="0" anchor="ctr"/>
-          <a:lstStyle/>
-          <a:p>
-            <a:pPr indent="0" marL="0">
-              <a:buNone/>
-            </a:pPr>
-            <a:r>
-              <a:rPr lang="en-US" sz="1200" dirty="0">
+            <a:off x="2148840" y="2423160"/>
+            <a:ext cx="1828800" cy="502920"/>
+          </a:xfrm>
+          <a:prstGeom prst="rect">
+            <a:avLst/>
+          </a:prstGeom>
+          <a:noFill/>
+          <a:ln/>
+        </p:spPr>
+        <p:txBody>
+          <a:bodyPr wrap="square" lIns="0" tIns="0" rIns="0" bIns="0" rtlCol="0" anchor="ctr"/>
+          <a:lstStyle/>
+          <a:p>
+            <a:pPr indent="0" marL="0">
+              <a:buNone/>
+            </a:pPr>
+            <a:r>
+              <a:rPr lang="en-US" sz="1150" dirty="0">
                 <a:solidFill>
                   <a:srgbClr val="3A423F"/>
                 </a:solidFill>
@@ -3517,9 +3517,9 @@
                 <a:ea typeface="Calibri" pitchFamily="34" charset="-122"/>
                 <a:cs typeface="Calibri" pitchFamily="34" charset="-120"/>
               </a:rPr>
-              <a:t>vào bằng suất dự trữ</a:t>
-            </a:r>
-            <a:endParaRPr lang="en-US" sz="1200" dirty="0"/>
+              <a:t>CLB mỗi học sinh, tính trung bình</a:t>
+            </a:r>
+            <a:endParaRPr lang="en-US" sz="1150" dirty="0"/>
           </a:p>
         </p:txBody>
       </p:sp>
@@ -3531,24 +3531,24 @@
         </p:nvSpPr>
         <p:spPr>
           <a:xfrm>
-            <a:off x="457200" y="3520440"/>
-            <a:ext cx="1737360" cy="548640"/>
-          </a:xfrm>
-          <a:prstGeom prst="rect">
-            <a:avLst/>
-          </a:prstGeom>
-          <a:noFill/>
-          <a:ln/>
-        </p:spPr>
-        <p:txBody>
-          <a:bodyPr wrap="square" lIns="0" tIns="0" rIns="0" bIns="0" rtlCol="0" anchor="ctr"/>
-          <a:lstStyle/>
-          <a:p>
-            <a:pPr indent="0" marL="0">
-              <a:buNone/>
-            </a:pPr>
-            <a:r>
-              <a:rPr lang="en-US" sz="2800" b="1" dirty="0">
+            <a:off x="457200" y="3063240"/>
+            <a:ext cx="1737360" cy="502920"/>
+          </a:xfrm>
+          <a:prstGeom prst="rect">
+            <a:avLst/>
+          </a:prstGeom>
+          <a:noFill/>
+          <a:ln/>
+        </p:spPr>
+        <p:txBody>
+          <a:bodyPr wrap="square" lIns="0" tIns="0" rIns="0" bIns="0" rtlCol="0" anchor="ctr"/>
+          <a:lstStyle/>
+          <a:p>
+            <a:pPr indent="0" marL="0">
+              <a:buNone/>
+            </a:pPr>
+            <a:r>
+              <a:rPr lang="en-US" sz="2600" b="1" dirty="0">
                 <a:solidFill>
                   <a:srgbClr val="3F6B52"/>
                 </a:solidFill>
@@ -3556,9 +3556,9 @@
                 <a:ea typeface="Cambria" pitchFamily="34" charset="-122"/>
                 <a:cs typeface="Cambria" pitchFamily="34" charset="-120"/>
               </a:rPr>
-              <a:t>0,011 s</a:t>
-            </a:r>
-            <a:endParaRPr lang="en-US" sz="2800" dirty="0"/>
+              <a:t>0,04 s</a:t>
+            </a:r>
+            <a:endParaRPr lang="en-US" sz="2600" dirty="0"/>
           </a:p>
         </p:txBody>
       </p:sp>
@@ -3570,24 +3570,24 @@
         </p:nvSpPr>
         <p:spPr>
           <a:xfrm>
-            <a:off x="2103120" y="3520440"/>
-            <a:ext cx="1783080" cy="548640"/>
-          </a:xfrm>
-          <a:prstGeom prst="rect">
-            <a:avLst/>
-          </a:prstGeom>
-          <a:noFill/>
-          <a:ln/>
-        </p:spPr>
-        <p:txBody>
-          <a:bodyPr wrap="square" lIns="0" tIns="0" rIns="0" bIns="0" rtlCol="0" anchor="ctr"/>
-          <a:lstStyle/>
-          <a:p>
-            <a:pPr indent="0" marL="0">
-              <a:buNone/>
-            </a:pPr>
-            <a:r>
-              <a:rPr lang="en-US" sz="1200" dirty="0">
+            <a:off x="2148840" y="3063240"/>
+            <a:ext cx="1828800" cy="502920"/>
+          </a:xfrm>
+          <a:prstGeom prst="rect">
+            <a:avLst/>
+          </a:prstGeom>
+          <a:noFill/>
+          <a:ln/>
+        </p:spPr>
+        <p:txBody>
+          <a:bodyPr wrap="square" lIns="0" tIns="0" rIns="0" bIns="0" rtlCol="0" anchor="ctr"/>
+          <a:lstStyle/>
+          <a:p>
+            <a:pPr indent="0" marL="0">
+              <a:buNone/>
+            </a:pPr>
+            <a:r>
+              <a:rPr lang="en-US" sz="1150" dirty="0">
                 <a:solidFill>
                   <a:srgbClr val="3A423F"/>
                 </a:solidFill>
@@ -3597,7 +3597,7 @@
               </a:rPr>
               <a:t>thời gian chạy</a:t>
             </a:r>
-            <a:endParaRPr lang="en-US" sz="1200" dirty="0"/>
+            <a:endParaRPr lang="en-US" sz="1150" dirty="0"/>
           </a:p>
         </p:txBody>
       </p:sp>
@@ -3609,12 +3609,12 @@
         </p:nvSpPr>
         <p:spPr>
           <a:xfrm>
-            <a:off x="4160520" y="1143000"/>
-            <a:ext cx="4526280" cy="3154680"/>
+            <a:off x="4160520" y="1097280"/>
+            <a:ext cx="4526280" cy="2606040"/>
           </a:xfrm>
           <a:prstGeom prst="roundRect">
             <a:avLst>
-              <a:gd name="adj" fmla="val 2319"/>
+              <a:gd name="adj" fmla="val 2807"/>
             </a:avLst>
           </a:prstGeom>
           <a:solidFill>
@@ -3635,8 +3635,8 @@
           <p:nvPr/>
         </p:nvGraphicFramePr>
         <p:xfrm>
-          <a:off x="4297680" y="1234440"/>
-          <a:ext cx="4251960" cy="2971800"/>
+          <a:off x="4297680" y="1170432"/>
+          <a:ext cx="4251960" cy="2468880"/>
         </p:xfrm>
         <a:graphic xmlns:a="http://schemas.openxmlformats.org/drawingml/2006/main">
           <a:graphicData uri="http://schemas.openxmlformats.org/drawingml/2006/chart">
@@ -3652,12 +3652,92 @@
         </p:nvSpPr>
         <p:spPr>
           <a:xfrm>
-            <a:off x="457200" y="4389120"/>
-            <a:ext cx="7726680" cy="384048"/>
+            <a:off x="457200" y="3794760"/>
+            <a:ext cx="8229600" cy="502920"/>
           </a:xfrm>
           <a:prstGeom prst="roundRect">
             <a:avLst>
-              <a:gd name="adj" fmla="val 14286"/>
+              <a:gd name="adj" fmla="val 14545"/>
+            </a:avLst>
+          </a:prstGeom>
+          <a:solidFill>
+            <a:srgbClr val="FFFFFF"/>
+          </a:solidFill>
+          <a:ln w="9525">
+            <a:solidFill>
+              <a:srgbClr val="DBDCD5"/>
+            </a:solidFill>
+            <a:prstDash val="solid"/>
+          </a:ln>
+        </p:spPr>
+      </p:sp>
+      <p:sp>
+        <p:nvSpPr>
+          <p:cNvPr id="15" name="Text 12"/>
+          <p:cNvSpPr txBox="1"/>
+          <p:nvPr/>
+        </p:nvSpPr>
+        <p:spPr>
+          <a:xfrm>
+            <a:off x="640080" y="3794760"/>
+            <a:ext cx="7863840" cy="502920"/>
+          </a:xfrm>
+          <a:prstGeom prst="rect">
+            <a:avLst/>
+          </a:prstGeom>
+          <a:noFill/>
+          <a:ln/>
+        </p:spPr>
+        <p:txBody>
+          <a:bodyPr wrap="square" lIns="0" tIns="0" rIns="0" bIns="0" rtlCol="0" anchor="ctr"/>
+          <a:lstStyle/>
+          <a:p>
+            <a:pPr indent="0" marL="0">
+              <a:buNone/>
+            </a:pPr>
+            <a:r>
+              <a:rPr lang="en-US" sz="1100" b="1" dirty="0">
+                <a:solidFill>
+                  <a:srgbClr val="1C2321"/>
+                </a:solidFill>
+                <a:latin typeface="Calibri" pitchFamily="34" charset="0"/>
+                <a:ea typeface="Calibri" pitchFamily="34" charset="-122"/>
+                <a:cs typeface="Calibri" pitchFamily="34" charset="-120"/>
+              </a:rPr>
+              <a:t>So sánh với bộ cạnh tranh cao </a:t>
+            </a:r>
+            <a:pPr indent="0" marL="0">
+              <a:buNone/>
+            </a:pPr>
+            <a:r>
+              <a:rPr lang="en-US" sz="1100" dirty="0">
+                <a:solidFill>
+                  <a:srgbClr val="3A423F"/>
+                </a:solidFill>
+                <a:latin typeface="Calibri" pitchFamily="34" charset="0"/>
+                <a:ea typeface="Calibri" pitchFamily="34" charset="-122"/>
+                <a:cs typeface="Calibri" pitchFamily="34" charset="-120"/>
+              </a:rPr>
+              <a:t>(120 học sinh, 1 buổi, cố ý thiếu chỗ ở 4 CLB): 108/120 học sinh có CLB, 59% được nguyện vọng 1.</a:t>
+            </a:r>
+            <a:endParaRPr lang="en-US" sz="1100" dirty="0"/>
+          </a:p>
+        </p:txBody>
+      </p:sp>
+      <p:sp>
+        <p:nvSpPr>
+          <p:cNvPr id="16" name="Shape 13"/>
+          <p:cNvSpPr/>
+          <p:nvPr/>
+        </p:nvSpPr>
+        <p:spPr>
+          <a:xfrm>
+            <a:off x="457200" y="4389120"/>
+            <a:ext cx="7726680" cy="347472"/>
+          </a:xfrm>
+          <a:prstGeom prst="roundRect">
+            <a:avLst>
+              <a:gd name="adj" fmla="val 15789"/>
             </a:avLst>
           </a:prstGeom>
           <a:solidFill>
@@ -3673,30 +3753,30 @@
       </p:sp>
       <p:sp>
         <p:nvSpPr>
-          <p:cNvPr id="15" name="Text 12"/>
+          <p:cNvPr id="17" name="Text 14"/>
           <p:cNvSpPr txBox="1"/>
           <p:nvPr/>
         </p:nvSpPr>
         <p:spPr>
           <a:xfrm>
             <a:off x="640080" y="4389120"/>
-            <a:ext cx="7406640" cy="384048"/>
-          </a:xfrm>
-          <a:prstGeom prst="rect">
-            <a:avLst/>
-          </a:prstGeom>
-          <a:noFill/>
-          <a:ln/>
-        </p:spPr>
-        <p:txBody>
-          <a:bodyPr wrap="square" lIns="0" tIns="0" rIns="0" bIns="0" rtlCol="0" anchor="ctr"/>
-          <a:lstStyle/>
-          <a:p>
-            <a:pPr indent="0" marL="0">
-              <a:buNone/>
-            </a:pPr>
-            <a:r>
-              <a:rPr lang="en-US" sz="1100" b="1" dirty="0">
+            <a:ext cx="7406640" cy="347472"/>
+          </a:xfrm>
+          <a:prstGeom prst="rect">
+            <a:avLst/>
+          </a:prstGeom>
+          <a:noFill/>
+          <a:ln/>
+        </p:spPr>
+        <p:txBody>
+          <a:bodyPr wrap="square" lIns="0" tIns="0" rIns="0" bIns="0" rtlCol="0" anchor="ctr"/>
+          <a:lstStyle/>
+          <a:p>
+            <a:pPr indent="0" marL="0">
+              <a:buNone/>
+            </a:pPr>
+            <a:r>
+              <a:rPr lang="en-US" sz="1050" b="1" dirty="0">
                 <a:solidFill>
                   <a:srgbClr val="B84A3E"/>
                 </a:solidFill>
@@ -3710,7 +3790,7 @@
               <a:buNone/>
             </a:pPr>
             <a:r>
-              <a:rPr lang="en-US" sz="1100" dirty="0">
+              <a:rPr lang="en-US" sz="1050" dirty="0">
                 <a:solidFill>
                   <a:srgbClr val="3A423F"/>
                 </a:solidFill>
@@ -3718,15 +3798,15 @@
                 <a:ea typeface="Calibri" pitchFamily="34" charset="-122"/>
                 <a:cs typeface="Calibri" pitchFamily="34" charset="-120"/>
               </a:rPr>
-              <a:t> Bộ dữ liệu do máy tạo ra để thử thuật toán, không phải số liệu thật của học sinh trong trường.</a:t>
-            </a:r>
-            <a:endParaRPr lang="en-US" sz="1100" dirty="0"/>
-          </a:p>
-        </p:txBody>
-      </p:sp>
-      <p:sp>
-        <p:nvSpPr>
-          <p:cNvPr id="16" name="Text 13"/>
+              <a:t> Cả hai bộ do máy tạo ra để thử thuật toán, không phải số liệu thật của học sinh trong trường.</a:t>
+            </a:r>
+            <a:endParaRPr lang="en-US" sz="1050" dirty="0"/>
+          </a:p>
+        </p:txBody>
+      </p:sp>
+      <p:sp>
+        <p:nvSpPr>
+          <p:cNvPr id="18" name="Text 15"/>
           <p:cNvSpPr txBox="1"/>
           <p:nvPr/>
         </p:nvSpPr>
@@ -7818,7 +7898,7 @@
                 <a:ea typeface="Calibri" pitchFamily="34" charset="-122"/>
                 <a:cs typeface="Calibri" pitchFamily="34" charset="-120"/>
               </a:rPr>
-              <a:t>120 học sinh, thử tải tới 5 000 học sinh</a:t>
+              <a:t>200 học sinh 6 buổi, thử tải tới 5 000 học sinh</a:t>
             </a:r>
             <a:endParaRPr lang="en-US" sz="1100" dirty="0"/>
           </a:p>
@@ -13412,7 +13492,7 @@
       </p:sp>
       <p:pic>
         <p:nvPicPr>
-          <p:cNvPr id="23" name="Image 0" descr="/tmp/claude-0/-home-user-rbda-kiosk/30f99193-b3ff-5853-a228-d09690c4e584/scratchpad/shots/c_pipeline.png">    </p:cNvPr>
+          <p:cNvPr id="23" name="Image 0" descr="/tmp/claude-0/-home-user-rbda-kiosk/30f99193-b3ff-5853-a228-d09690c4e584/scratchpad/shots/c_cb_pipeline.png">    </p:cNvPr>
           <p:cNvPicPr>
             <a:picLocks noChangeAspect="1"/>
           </p:cNvPicPr>
@@ -13427,7 +13507,7 @@
         <p:spPr>
           <a:xfrm>
             <a:off x="3611880" y="1280160"/>
-            <a:ext cx="5074920" cy="2343626"/>
+            <a:ext cx="5074920" cy="2435257"/>
           </a:xfrm>
           <a:prstGeom prst="rect">
             <a:avLst/>
@@ -13449,7 +13529,7 @@
         </p:nvSpPr>
         <p:spPr>
           <a:xfrm>
-            <a:off x="3611880" y="3715226"/>
+            <a:off x="3611880" y="3806857"/>
             <a:ext cx="5074920" cy="274320"/>
           </a:xfrm>
           <a:prstGeom prst="rect">
@@ -13474,7 +13554,7 @@
                 <a:ea typeface="Calibri" pitchFamily="34" charset="-122"/>
                 <a:cs typeface="Calibri" pitchFamily="34" charset="-120"/>
               </a:rPr>
-              <a:t>Màn hình Vận hành sắp xếp: kéo thả tệp, xem cảnh báo rồi bấm chạy.</a:t>
+              <a:t>Màn hình Vận hành sắp xếp. Ở đây phần mềm cảnh báo 15 học sinh chưa ghi nguyện vọng nào.</a:t>
             </a:r>
             <a:endParaRPr lang="en-US" sz="1000" dirty="0"/>
           </a:p>
@@ -13513,7 +13593,7 @@
                 <a:ea typeface="Calibri" pitchFamily="34" charset="-122"/>
                 <a:cs typeface="Calibri" pitchFamily="34" charset="-120"/>
               </a:rPr>
-              <a:t>Với 120 học sinh, bước chạy và xuất kết quả xong trong chưa đầy một giây.</a:t>
+              <a:t>Với 200 học sinh và 6 buổi, bước chạy và xuất kết quả xong trong chưa đầy một giây.</a:t>
             </a:r>
             <a:endParaRPr lang="en-US" sz="1200" dirty="0"/>
           </a:p>
@@ -13709,7 +13789,7 @@
       </p:sp>
       <p:pic>
         <p:nvPicPr>
-          <p:cNvPr id="4" name="Image 0" descr="/tmp/claude-0/-home-user-rbda-kiosk/30f99193-b3ff-5853-a228-d09690c4e584/scratchpad/shots/c_results.png">    </p:cNvPr>
+          <p:cNvPr id="4" name="Image 0" descr="/tmp/claude-0/-home-user-rbda-kiosk/30f99193-b3ff-5853-a228-d09690c4e584/scratchpad/shots/c_cb_results.png">    </p:cNvPr>
           <p:cNvPicPr>
             <a:picLocks noChangeAspect="1"/>
           </p:cNvPicPr>
@@ -13724,7 +13804,7 @@
         <p:spPr>
           <a:xfrm>
             <a:off x="457200" y="1234440"/>
-            <a:ext cx="4937760" cy="2492850"/>
+            <a:ext cx="4937760" cy="2420941"/>
           </a:xfrm>
           <a:prstGeom prst="rect">
             <a:avLst/>
@@ -13746,7 +13826,7 @@
         </p:nvSpPr>
         <p:spPr>
           <a:xfrm>
-            <a:off x="457200" y="3818730"/>
+            <a:off x="457200" y="3746821"/>
             <a:ext cx="4937760" cy="274320"/>
           </a:xfrm>
           <a:prstGeom prst="rect">
@@ -13771,7 +13851,7 @@
                 <a:ea typeface="Calibri" pitchFamily="34" charset="-122"/>
                 <a:cs typeface="Calibri" pitchFamily="34" charset="-120"/>
               </a:rPr>
-              <a:t>Màu xanh: xét chung. Màu vàng: vào bằng suất dự trữ. Dữ liệu mô phỏng.</a:t>
+              <a:t>Màu xanh: xét chung. Màu vàng: vào bằng suất dự trữ. Dữ liệu mô phỏng, 200 học sinh.</a:t>
             </a:r>
             <a:endParaRPr lang="en-US" sz="1000" dirty="0"/>
           </a:p>
